--- a/system-design-101/vi/lessons/sd-07-019/slides/sd-07-019.pptx
+++ b/system-design-101/vi/lessons/sd-07-019/slides/sd-07-019.pptx
@@ -1939,7 +1939,7 @@
               <a:buNone/>
             </a:pPr>
             <a:r>
-              <a:rPr lang="en-US" sz="3000" dirty="0" spc="66" kern="0">
+              <a:rPr lang="en-US" sz="3000" dirty="0" spc="-66" kern="0">
                 <a:solidFill>
                   <a:srgbClr val="E4E1D8"/>
                 </a:solidFill>
@@ -1947,7 +1947,62 @@
                 <a:ea typeface="Be Vietnam Pro" pitchFamily="34" charset="-122"/>
                 <a:cs typeface="Be Vietnam Pro" pitchFamily="34" charset="-120"/>
               </a:rPr>
-              <a:t>Gửi</a:t>
+              <a:t>Trong</a:t>
+            </a:r>
+            <a:r>
+              <a:rPr lang="en-US" sz="3000" dirty="0" spc="3" kern="0">
+                <a:solidFill>
+                  <a:srgbClr val="E4E1D8"/>
+                </a:solidFill>
+                <a:latin typeface="Be Vietnam Pro" pitchFamily="34" charset="0"/>
+                <a:ea typeface="Be Vietnam Pro" pitchFamily="34" charset="-122"/>
+                <a:cs typeface="Be Vietnam Pro" pitchFamily="34" charset="-120"/>
+              </a:rPr>
+              <a:t> ví</a:t>
+            </a:r>
+            <a:r>
+              <a:rPr lang="en-US" sz="3000" dirty="0" spc="2" kern="0">
+                <a:solidFill>
+                  <a:srgbClr val="E4E1D8"/>
+                </a:solidFill>
+                <a:latin typeface="Be Vietnam Pro" pitchFamily="34" charset="0"/>
+                <a:ea typeface="Be Vietnam Pro" pitchFamily="34" charset="-122"/>
+                <a:cs typeface="Be Vietnam Pro" pitchFamily="34" charset="-120"/>
+              </a:rPr>
+              <a:t> dụ</a:t>
+            </a:r>
+            <a:r>
+              <a:rPr lang="en-US" sz="3000" dirty="0" spc="1" kern="0">
+                <a:solidFill>
+                  <a:srgbClr val="E4E1D8"/>
+                </a:solidFill>
+                <a:latin typeface="Be Vietnam Pro" pitchFamily="34" charset="0"/>
+                <a:ea typeface="Be Vietnam Pro" pitchFamily="34" charset="-122"/>
+                <a:cs typeface="Be Vietnam Pro" pitchFamily="34" charset="-120"/>
+              </a:rPr>
+              <a:t> của</a:t>
+            </a:r>
+            <a:r>
+              <a:rPr lang="en-US" sz="3000" dirty="0" spc="-1" kern="0">
+                <a:solidFill>
+                  <a:srgbClr val="E4E1D8"/>
+                </a:solidFill>
+                <a:latin typeface="Be Vietnam Pro" pitchFamily="34" charset="0"/>
+                <a:ea typeface="Be Vietnam Pro" pitchFamily="34" charset="-122"/>
+                <a:cs typeface="Be Vietnam Pro" pitchFamily="34" charset="-120"/>
+              </a:rPr>
+              <a:t> nguồn:</a:t>
+            </a:r>
+            <a:r>
+              <a:rPr lang="en-US" sz="3000" dirty="0" spc="51" kern="0">
+                <a:solidFill>
+                  <a:srgbClr val="E4E1D8"/>
+                </a:solidFill>
+                <a:latin typeface="Be Vietnam Pro" pitchFamily="34" charset="0"/>
+                <a:ea typeface="Be Vietnam Pro" pitchFamily="34" charset="-122"/>
+                <a:cs typeface="Be Vietnam Pro" pitchFamily="34" charset="-120"/>
+              </a:rPr>
+              <a:t> gửi</a:t>
             </a:r>
             <a:r>
               <a:rPr lang="en-US" sz="3000" dirty="0" spc="9" kern="0">
@@ -1961,6 +2016,17 @@
               <a:t> trước</a:t>
             </a:r>
             <a:r>
+              <a:rPr lang="en-US" sz="3000" dirty="0" spc="4" kern="0">
+                <a:solidFill>
+                  <a:srgbClr val="E4E1D8"/>
+                </a:solidFill>
+                <a:latin typeface="Be Vietnam Pro" pitchFamily="34" charset="0"/>
+                <a:ea typeface="Be Vietnam Pro" pitchFamily="34" charset="-122"/>
+                <a:cs typeface="Be Vietnam Pro" pitchFamily="34" charset="-120"/>
+              </a:rPr>
+              <a:t> 19</a:t>
+            </a:r>
+            <a:r>
               <a:rPr lang="en-US" sz="3000" dirty="0" spc="3" kern="0">
                 <a:solidFill>
                   <a:srgbClr val="E4E1D8"/>
@@ -1969,29 +2035,7 @@
                 <a:ea typeface="Be Vietnam Pro" pitchFamily="34" charset="-122"/>
                 <a:cs typeface="Be Vietnam Pro" pitchFamily="34" charset="-120"/>
               </a:rPr>
-              <a:t> 19</a:t>
-            </a:r>
-            <a:r>
-              <a:rPr lang="en-US" sz="3000" dirty="0" spc="4" kern="0">
-                <a:solidFill>
-                  <a:srgbClr val="E4E1D8"/>
-                </a:solidFill>
-                <a:latin typeface="Be Vietnam Pro" pitchFamily="34" charset="0"/>
-                <a:ea typeface="Be Vietnam Pro" pitchFamily="34" charset="-122"/>
-                <a:cs typeface="Be Vietnam Pro" pitchFamily="34" charset="-120"/>
-              </a:rPr>
-              <a:t> giờ</a:t>
-            </a:r>
-            <a:r>
-              <a:rPr lang="en-US" sz="3000" dirty="0" spc="1" kern="0">
-                <a:solidFill>
-                  <a:srgbClr val="E4E1D8"/>
-                </a:solidFill>
-                <a:latin typeface="Be Vietnam Pro" pitchFamily="34" charset="0"/>
-                <a:ea typeface="Be Vietnam Pro" pitchFamily="34" charset="-122"/>
-                <a:cs typeface="Be Vietnam Pro" pitchFamily="34" charset="-120"/>
-              </a:rPr>
-              <a:t> thì</a:t>
+              <a:t> giờ,</a:t>
             </a:r>
             <a:r>
               <a:rPr lang="en-US" sz="3000" dirty="0" spc="-7" kern="0">
@@ -2182,7 +2226,7 @@
               <a:t> gian</a:t>
             </a:r>
             <a:r>
-              <a:rPr lang="en-US" sz="2100" dirty="0" spc="6" kern="0">
+              <a:rPr lang="en-US" sz="2100" dirty="0" spc="5" kern="0">
                 <a:solidFill>
                   <a:srgbClr val="9AA0B5"/>
                 </a:solidFill>
@@ -2190,7 +2234,95 @@
                 <a:ea typeface="Be Vietnam Pro" pitchFamily="34" charset="-122"/>
                 <a:cs typeface="Be Vietnam Pro" pitchFamily="34" charset="-120"/>
               </a:rPr>
-              <a:t> thực</a:t>
+              <a:t> thực.</a:t>
+            </a:r>
+            <a:r>
+              <a:rPr lang="en-US" sz="2100" dirty="0" spc="-3" kern="0">
+                <a:solidFill>
+                  <a:srgbClr val="9AA0B5"/>
+                </a:solidFill>
+                <a:latin typeface="Be Vietnam Pro" pitchFamily="34" charset="0"/>
+                <a:ea typeface="Be Vietnam Pro" pitchFamily="34" charset="-122"/>
+                <a:cs typeface="Be Vietnam Pro" pitchFamily="34" charset="-120"/>
+              </a:rPr>
+              <a:t> Giờ</a:t>
+            </a:r>
+            <a:r>
+              <a:rPr lang="en-US" sz="2100" dirty="0" spc="-7" kern="0">
+                <a:solidFill>
+                  <a:srgbClr val="9AA0B5"/>
+                </a:solidFill>
+                <a:latin typeface="Be Vietnam Pro" pitchFamily="34" charset="0"/>
+                <a:ea typeface="Be Vietnam Pro" pitchFamily="34" charset="-122"/>
+                <a:cs typeface="Be Vietnam Pro" pitchFamily="34" charset="-120"/>
+              </a:rPr>
+              <a:t> chốt</a:t>
+            </a:r>
+            <a:r>
+              <a:rPr lang="en-US" sz="2100" dirty="0" spc="-10" kern="0">
+                <a:solidFill>
+                  <a:srgbClr val="9AA0B5"/>
+                </a:solidFill>
+                <a:latin typeface="Be Vietnam Pro" pitchFamily="34" charset="0"/>
+                <a:ea typeface="Be Vietnam Pro" pitchFamily="34" charset="-122"/>
+                <a:cs typeface="Be Vietnam Pro" pitchFamily="34" charset="-120"/>
+              </a:rPr>
+              <a:t> thật</a:t>
+            </a:r>
+            <a:r>
+              <a:rPr lang="en-US" sz="2100" dirty="0" spc="-4" kern="0">
+                <a:solidFill>
+                  <a:srgbClr val="9AA0B5"/>
+                </a:solidFill>
+                <a:latin typeface="Be Vietnam Pro" pitchFamily="34" charset="0"/>
+                <a:ea typeface="Be Vietnam Pro" pitchFamily="34" charset="-122"/>
+                <a:cs typeface="Be Vietnam Pro" pitchFamily="34" charset="-120"/>
+              </a:rPr>
+              <a:t> do</a:t>
+            </a:r>
+            <a:r>
+              <a:rPr lang="en-US" sz="2100" dirty="0" spc="-9" kern="0">
+                <a:solidFill>
+                  <a:srgbClr val="9AA0B5"/>
+                </a:solidFill>
+                <a:latin typeface="Be Vietnam Pro" pitchFamily="34" charset="0"/>
+                <a:ea typeface="Be Vietnam Pro" pitchFamily="34" charset="-122"/>
+                <a:cs typeface="Be Vietnam Pro" pitchFamily="34" charset="-120"/>
+              </a:rPr>
+              <a:t> ngân</a:t>
+            </a:r>
+            <a:r>
+              <a:rPr lang="en-US" sz="2100" dirty="0" spc="-1" kern="0">
+                <a:solidFill>
+                  <a:srgbClr val="9AA0B5"/>
+                </a:solidFill>
+                <a:latin typeface="Be Vietnam Pro" pitchFamily="34" charset="0"/>
+                <a:ea typeface="Be Vietnam Pro" pitchFamily="34" charset="-122"/>
+                <a:cs typeface="Be Vietnam Pro" pitchFamily="34" charset="-120"/>
+              </a:rPr>
+              <a:t> hàng</a:t>
+            </a:r>
+            <a:r>
+              <a:rPr lang="en-US" sz="2100" dirty="0" spc="-16" kern="0">
+                <a:solidFill>
+                  <a:srgbClr val="9AA0B5"/>
+                </a:solidFill>
+                <a:latin typeface="Be Vietnam Pro" pitchFamily="34" charset="0"/>
+                <a:ea typeface="Be Vietnam Pro" pitchFamily="34" charset="-122"/>
+                <a:cs typeface="Be Vietnam Pro" pitchFamily="34" charset="-120"/>
+              </a:rPr>
+              <a:t> gốc</a:t>
+            </a:r>
+            <a:r>
+              <a:rPr lang="en-US" sz="2100" dirty="0" spc="-1" kern="0">
+                <a:solidFill>
+                  <a:srgbClr val="9AA0B5"/>
+                </a:solidFill>
+                <a:latin typeface="Be Vietnam Pro" pitchFamily="34" charset="0"/>
+                <a:ea typeface="Be Vietnam Pro" pitchFamily="34" charset="-122"/>
+                <a:cs typeface="Be Vietnam Pro" pitchFamily="34" charset="-120"/>
+              </a:rPr>
+              <a:t> đặt.</a:t>
             </a:r>
             <a:endParaRPr lang="en-US" sz="2100" dirty="0"/>
           </a:p>
@@ -2442,7 +2574,7 @@
               <a:buNone/>
             </a:pPr>
             <a:r>
-              <a:rPr lang="en-US" sz="1950" b="1" dirty="0" spc="3" kern="0">
+              <a:rPr lang="en-US" sz="1950" b="1" dirty="0" spc="2" kern="0">
                 <a:solidFill>
                   <a:srgbClr val="FF6A4D"/>
                 </a:solidFill>
@@ -2450,10 +2582,10 @@
                 <a:ea typeface="Be Vietnam Pro" pitchFamily="34" charset="-122"/>
                 <a:cs typeface="Be Vietnam Pro" pitchFamily="34" charset="-120"/>
               </a:rPr>
-              <a:t>19</a:t>
-            </a:r>
-            <a:r>
-              <a:rPr lang="en-US" sz="1950" b="1" dirty="0" spc="-1" kern="0">
+              <a:t>Ví</a:t>
+            </a:r>
+            <a:r>
+              <a:rPr lang="en-US" sz="1950" b="1" dirty="0" spc="0" kern="0">
                 <a:solidFill>
                   <a:srgbClr val="FF6A4D"/>
                 </a:solidFill>
@@ -2461,10 +2593,10 @@
                 <a:ea typeface="Be Vietnam Pro" pitchFamily="34" charset="-122"/>
                 <a:cs typeface="Be Vietnam Pro" pitchFamily="34" charset="-120"/>
               </a:rPr>
-              <a:t> giờ: giờ</a:t>
-            </a:r>
-            <a:r>
-              <a:rPr lang="en-US" sz="1950" b="1" dirty="0" spc="-7" kern="0">
+              <a:t> dụ:</a:t>
+            </a:r>
+            <a:r>
+              <a:rPr lang="en-US" sz="1950" b="1" dirty="0" spc="2" kern="0">
                 <a:solidFill>
                   <a:srgbClr val="FF6A4D"/>
                 </a:solidFill>
@@ -2472,10 +2604,32 @@
                 <a:ea typeface="Be Vietnam Pro" pitchFamily="34" charset="-122"/>
                 <a:cs typeface="Be Vietnam Pro" pitchFamily="34" charset="-120"/>
               </a:rPr>
+              <a:t> 19</a:t>
+            </a:r>
+            <a:r>
+              <a:rPr lang="en-US" sz="1950" b="1" dirty="0" spc="-2" kern="0">
+                <a:solidFill>
+                  <a:srgbClr val="FF6A4D"/>
+                </a:solidFill>
+                <a:latin typeface="Be Vietnam Pro" pitchFamily="34" charset="0"/>
+                <a:ea typeface="Be Vietnam Pro" pitchFamily="34" charset="-122"/>
+                <a:cs typeface="Be Vietnam Pro" pitchFamily="34" charset="-120"/>
+              </a:rPr>
+              <a:t> giờ</a:t>
+            </a:r>
+            <a:r>
+              <a:rPr lang="en-US" sz="1950" b="1" dirty="0" spc="-6" kern="0">
+                <a:solidFill>
+                  <a:srgbClr val="FF6A4D"/>
+                </a:solidFill>
+                <a:latin typeface="Be Vietnam Pro" pitchFamily="34" charset="0"/>
+                <a:ea typeface="Be Vietnam Pro" pitchFamily="34" charset="-122"/>
+                <a:cs typeface="Be Vietnam Pro" pitchFamily="34" charset="-120"/>
+              </a:rPr>
               <a:t> chốt</a:t>
             </a:r>
             <a:r>
-              <a:rPr lang="en-US" sz="1950" b="1" dirty="0" spc="35" kern="0">
+              <a:rPr lang="en-US" sz="1950" b="1" dirty="0" spc="34" kern="0">
                 <a:solidFill>
                   <a:srgbClr val="FF6A4D"/>
                 </a:solidFill>
@@ -2534,7 +2688,7 @@
               <a:buNone/>
             </a:pPr>
             <a:r>
-              <a:rPr lang="en-US" sz="1950" b="1" dirty="0" spc="11" kern="0">
+              <a:rPr lang="en-US" sz="1950" b="1" dirty="0" spc="2" kern="0">
                 <a:solidFill>
                   <a:srgbClr val="7C93FF"/>
                 </a:solidFill>
@@ -2542,7 +2696,29 @@
                 <a:ea typeface="Be Vietnam Pro" pitchFamily="34" charset="-122"/>
                 <a:cs typeface="Be Vietnam Pro" pitchFamily="34" charset="-120"/>
               </a:rPr>
-              <a:t>Nửa</a:t>
+              <a:t>Ví</a:t>
+            </a:r>
+            <a:r>
+              <a:rPr lang="en-US" sz="1950" b="1" dirty="0" spc="0" kern="0">
+                <a:solidFill>
+                  <a:srgbClr val="7C93FF"/>
+                </a:solidFill>
+                <a:latin typeface="Be Vietnam Pro" pitchFamily="34" charset="0"/>
+                <a:ea typeface="Be Vietnam Pro" pitchFamily="34" charset="-122"/>
+                <a:cs typeface="Be Vietnam Pro" pitchFamily="34" charset="-120"/>
+              </a:rPr>
+              <a:t> dụ:</a:t>
+            </a:r>
+            <a:r>
+              <a:rPr lang="en-US" sz="1950" b="1" dirty="0" spc="9" kern="0">
+                <a:solidFill>
+                  <a:srgbClr val="7C93FF"/>
+                </a:solidFill>
+                <a:latin typeface="Be Vietnam Pro" pitchFamily="34" charset="0"/>
+                <a:ea typeface="Be Vietnam Pro" pitchFamily="34" charset="-122"/>
+                <a:cs typeface="Be Vietnam Pro" pitchFamily="34" charset="-120"/>
+              </a:rPr>
+              <a:t> nửa</a:t>
             </a:r>
             <a:r>
               <a:rPr lang="en-US" sz="1950" b="1" dirty="0" spc="1" kern="0">
@@ -2553,7 +2729,7 @@
                 <a:ea typeface="Be Vietnam Pro" pitchFamily="34" charset="-122"/>
                 <a:cs typeface="Be Vietnam Pro" pitchFamily="34" charset="-120"/>
               </a:rPr>
-              <a:t> đêm:</a:t>
+              <a:t> đêm</a:t>
             </a:r>
             <a:r>
               <a:rPr lang="en-US" sz="1950" b="1" dirty="0" spc="-3" kern="0">
@@ -2626,7 +2802,7 @@
               <a:buNone/>
             </a:pPr>
             <a:r>
-              <a:rPr lang="en-US" sz="1950" b="1" dirty="0" spc="3" kern="0">
+              <a:rPr lang="en-US" sz="1950" b="1" dirty="0" spc="2" kern="0">
                 <a:solidFill>
                   <a:srgbClr val="3DD6A0"/>
                 </a:solidFill>
@@ -2634,10 +2810,10 @@
                 <a:ea typeface="Be Vietnam Pro" pitchFamily="34" charset="-122"/>
                 <a:cs typeface="Be Vietnam Pro" pitchFamily="34" charset="-120"/>
               </a:rPr>
-              <a:t>6</a:t>
-            </a:r>
-            <a:r>
-              <a:rPr lang="en-US" sz="1950" b="1" dirty="0" spc="-2" kern="0">
+              <a:t>Ví</a:t>
+            </a:r>
+            <a:r>
+              <a:rPr lang="en-US" sz="1950" b="1" dirty="0" spc="0" kern="0">
                 <a:solidFill>
                   <a:srgbClr val="3DD6A0"/>
                 </a:solidFill>
@@ -2645,10 +2821,32 @@
                 <a:ea typeface="Be Vietnam Pro" pitchFamily="34" charset="-122"/>
                 <a:cs typeface="Be Vietnam Pro" pitchFamily="34" charset="-120"/>
               </a:rPr>
+              <a:t> dụ:</a:t>
+            </a:r>
+            <a:r>
+              <a:rPr lang="en-US" sz="1950" b="1" dirty="0" spc="1" kern="0">
+                <a:solidFill>
+                  <a:srgbClr val="3DD6A0"/>
+                </a:solidFill>
+                <a:latin typeface="Be Vietnam Pro" pitchFamily="34" charset="0"/>
+                <a:ea typeface="Be Vietnam Pro" pitchFamily="34" charset="-122"/>
+                <a:cs typeface="Be Vietnam Pro" pitchFamily="34" charset="-120"/>
+              </a:rPr>
+              <a:t> 6</a:t>
+            </a:r>
+            <a:r>
+              <a:rPr lang="en-US" sz="1950" b="1" dirty="0" spc="-1" kern="0">
+                <a:solidFill>
+                  <a:srgbClr val="3DD6A0"/>
+                </a:solidFill>
+                <a:latin typeface="Be Vietnam Pro" pitchFamily="34" charset="0"/>
+                <a:ea typeface="Be Vietnam Pro" pitchFamily="34" charset="-122"/>
+                <a:cs typeface="Be Vietnam Pro" pitchFamily="34" charset="-120"/>
+              </a:rPr>
               <a:t> giờ</a:t>
             </a:r>
             <a:r>
-              <a:rPr lang="en-US" sz="1950" b="1" dirty="0" spc="-1" kern="0">
+              <a:rPr lang="en-US" sz="1950" b="1" dirty="0" spc="-3" kern="0">
                 <a:solidFill>
                   <a:srgbClr val="3DD6A0"/>
                 </a:solidFill>
@@ -2656,21 +2854,21 @@
                 <a:ea typeface="Be Vietnam Pro" pitchFamily="34" charset="-122"/>
                 <a:cs typeface="Be Vietnam Pro" pitchFamily="34" charset="-120"/>
               </a:rPr>
-              <a:t> sáng:</a:t>
+              <a:t> sáng</a:t>
+            </a:r>
+            <a:r>
+              <a:rPr lang="en-US" sz="1950" b="1" dirty="0" spc="1" kern="0">
+                <a:solidFill>
+                  <a:srgbClr val="3DD6A0"/>
+                </a:solidFill>
+                <a:latin typeface="Be Vietnam Pro" pitchFamily="34" charset="0"/>
+                <a:ea typeface="Be Vietnam Pro" pitchFamily="34" charset="-122"/>
+                <a:cs typeface="Be Vietnam Pro" pitchFamily="34" charset="-120"/>
+              </a:rPr>
+              <a:t> tiền</a:t>
             </a:r>
             <a:r>
               <a:rPr lang="en-US" sz="1950" b="1" dirty="0" spc="0" kern="0">
-                <a:solidFill>
-                  <a:srgbClr val="3DD6A0"/>
-                </a:solidFill>
-                <a:latin typeface="Be Vietnam Pro" pitchFamily="34" charset="0"/>
-                <a:ea typeface="Be Vietnam Pro" pitchFamily="34" charset="-122"/>
-                <a:cs typeface="Be Vietnam Pro" pitchFamily="34" charset="-120"/>
-              </a:rPr>
-              <a:t> tiền</a:t>
-            </a:r>
-            <a:r>
-              <a:rPr lang="en-US" sz="1950" b="1" dirty="0" spc="1" kern="0">
                 <a:solidFill>
                   <a:srgbClr val="3DD6A0"/>
                 </a:solidFill>
@@ -5250,7 +5448,7 @@
               <a:buNone/>
             </a:pPr>
             <a:r>
-              <a:rPr lang="en-US" sz="2250" dirty="0" spc="48" kern="0">
+              <a:rPr lang="en-US" sz="2250" dirty="0" spc="-52" kern="0">
                 <a:solidFill>
                   <a:srgbClr val="14161C"/>
                 </a:solidFill>
@@ -5258,7 +5456,40 @@
                 <a:ea typeface="Be Vietnam Pro" pitchFamily="34" charset="-122"/>
                 <a:cs typeface="Be Vietnam Pro" pitchFamily="34" charset="-120"/>
               </a:rPr>
-              <a:t>Gửi</a:t>
+              <a:t>Trong</a:t>
+            </a:r>
+            <a:r>
+              <a:rPr lang="en-US" sz="2250" dirty="0" spc="-1" kern="0">
+                <a:solidFill>
+                  <a:srgbClr val="14161C"/>
+                </a:solidFill>
+                <a:latin typeface="Be Vietnam Pro" pitchFamily="34" charset="0"/>
+                <a:ea typeface="Be Vietnam Pro" pitchFamily="34" charset="-122"/>
+                <a:cs typeface="Be Vietnam Pro" pitchFamily="34" charset="-120"/>
+              </a:rPr>
+              <a:t> ví</a:t>
+            </a:r>
+            <a:r>
+              <a:rPr lang="en-US" sz="2250" dirty="0" spc="5" kern="0">
+                <a:solidFill>
+                  <a:srgbClr val="14161C"/>
+                </a:solidFill>
+                <a:latin typeface="Be Vietnam Pro" pitchFamily="34" charset="0"/>
+                <a:ea typeface="Be Vietnam Pro" pitchFamily="34" charset="-122"/>
+                <a:cs typeface="Be Vietnam Pro" pitchFamily="34" charset="-120"/>
+              </a:rPr>
+              <a:t> dụ:</a:t>
+            </a:r>
+            <a:r>
+              <a:rPr lang="en-US" sz="2250" dirty="0" spc="37" kern="0">
+                <a:solidFill>
+                  <a:srgbClr val="14161C"/>
+                </a:solidFill>
+                <a:latin typeface="Be Vietnam Pro" pitchFamily="34" charset="0"/>
+                <a:ea typeface="Be Vietnam Pro" pitchFamily="34" charset="-122"/>
+                <a:cs typeface="Be Vietnam Pro" pitchFamily="34" charset="-120"/>
+              </a:rPr>
+              <a:t> gửi</a:t>
             </a:r>
             <a:r>
               <a:rPr lang="en-US" sz="2250" dirty="0" spc="6" kern="0">
@@ -5316,7 +5547,7 @@
               <a:t> sáng</a:t>
             </a:r>
             <a:r>
-              <a:rPr lang="en-US" sz="2250" dirty="0" spc="2" kern="0">
+              <a:rPr lang="en-US" sz="2250" dirty="0" spc="1" kern="0">
                 <a:solidFill>
                   <a:srgbClr val="14161C"/>
                 </a:solidFill>
@@ -5327,7 +5558,7 @@
               <a:t> hôm</a:t>
             </a:r>
             <a:r>
-              <a:rPr lang="en-US" sz="2250" dirty="0" spc="-3" kern="0">
+              <a:rPr lang="en-US" sz="2250" dirty="0" spc="-2" kern="0">
                 <a:solidFill>
                   <a:srgbClr val="14161C"/>
                 </a:solidFill>
@@ -6101,7 +6332,7 @@
               <a:buNone/>
             </a:pPr>
             <a:r>
-              <a:rPr lang="en-US" sz="6900" dirty="0" spc="8" kern="0">
+              <a:rPr lang="en-US" sz="6900" dirty="0" spc="1" kern="0">
                 <a:solidFill>
                   <a:srgbClr val="F3EEE3"/>
                 </a:solidFill>
@@ -6109,10 +6340,10 @@
                 <a:ea typeface="Bricolage Grotesque ExtraBold" pitchFamily="34" charset="-122"/>
                 <a:cs typeface="Bricolage Grotesque ExtraBold" pitchFamily="34" charset="-120"/>
               </a:rPr>
-              <a:t>Chỉ</a:t>
-            </a:r>
-            <a:r>
-              <a:rPr lang="en-US" sz="6900" dirty="0" spc="-9" kern="0">
+              <a:t>Cần</a:t>
+            </a:r>
+            <a:r>
+              <a:rPr lang="en-US" sz="6900" dirty="0" spc="-36" kern="0">
                 <a:solidFill>
                   <a:srgbClr val="F3EEE3"/>
                 </a:solidFill>
@@ -6120,10 +6351,10 @@
                 <a:ea typeface="Bricolage Grotesque ExtraBold" pitchFamily="34" charset="-122"/>
                 <a:cs typeface="Bricolage Grotesque ExtraBold" pitchFamily="34" charset="-120"/>
               </a:rPr>
-              <a:t> ngân</a:t>
-            </a:r>
-            <a:r>
-              <a:rPr lang="en-US" sz="6900" dirty="0" spc="2" kern="0">
+              <a:t> tổ</a:t>
+            </a:r>
+            <a:r>
+              <a:rPr lang="en-US" sz="6900" dirty="0" spc="-58" kern="0">
                 <a:solidFill>
                   <a:srgbClr val="F3EEE3"/>
                 </a:solidFill>
@@ -6131,10 +6362,10 @@
                 <a:ea typeface="Bricolage Grotesque ExtraBold" pitchFamily="34" charset="-122"/>
                 <a:cs typeface="Bricolage Grotesque ExtraBold" pitchFamily="34" charset="-120"/>
               </a:rPr>
-              <a:t> hàng</a:t>
-            </a:r>
-            <a:r>
-              <a:rPr lang="en-US" sz="6900" dirty="0" spc="-33" kern="0">
+              <a:t> chức</a:t>
+            </a:r>
+            <a:r>
+              <a:rPr lang="en-US" sz="6900" dirty="0" spc="1" kern="0">
                 <a:solidFill>
                   <a:srgbClr val="F3EEE3"/>
                 </a:solidFill>
@@ -6142,10 +6373,10 @@
                 <a:ea typeface="Bricolage Grotesque ExtraBold" pitchFamily="34" charset="-122"/>
                 <a:cs typeface="Bricolage Grotesque ExtraBold" pitchFamily="34" charset="-120"/>
               </a:rPr>
-              <a:t> mới</a:t>
-            </a:r>
-            <a:r>
-              <a:rPr lang="en-US" sz="6900" dirty="0" spc="-26" kern="0">
+              <a:t> nhận</a:t>
+            </a:r>
+            <a:r>
+              <a:rPr lang="en-US" sz="6900" dirty="0" spc="6" kern="0">
                 <a:solidFill>
                   <a:srgbClr val="F3EEE3"/>
                 </a:solidFill>
@@ -6153,10 +6384,10 @@
                 <a:ea typeface="Bricolage Grotesque ExtraBold" pitchFamily="34" charset="-122"/>
                 <a:cs typeface="Bricolage Grotesque ExtraBold" pitchFamily="34" charset="-120"/>
               </a:rPr>
-              <a:t> khởi</a:t>
-            </a:r>
-            <a:r>
-              <a:rPr lang="en-US" sz="6900" dirty="0" spc="-6" kern="0">
+              <a:t> tiền</a:t>
+            </a:r>
+            <a:r>
+              <a:rPr lang="en-US" sz="6900" dirty="0" spc="34" kern="0">
                 <a:solidFill>
                   <a:srgbClr val="F3EEE3"/>
                 </a:solidFill>
@@ -6164,7 +6395,7 @@
                 <a:ea typeface="Bricolage Grotesque ExtraBold" pitchFamily="34" charset="-122"/>
                 <a:cs typeface="Bricolage Grotesque ExtraBold" pitchFamily="34" charset="-120"/>
               </a:rPr>
-              <a:t> tạo</a:t>
+              <a:t> gửi</a:t>
             </a:r>
             <a:endParaRPr lang="en-US" sz="6900" dirty="0"/>
           </a:p>
@@ -6389,7 +6620,7 @@
               <a:buNone/>
             </a:pPr>
             <a:r>
-              <a:rPr lang="en-US" sz="2250" b="1" dirty="0" spc="-5" kern="0">
+              <a:rPr lang="en-US" sz="2250" b="1" dirty="0" spc="0" kern="0">
                 <a:solidFill>
                   <a:srgbClr val="FFB454"/>
                 </a:solidFill>
@@ -6397,7 +6628,51 @@
                 <a:ea typeface="Be Vietnam Pro" pitchFamily="34" charset="-122"/>
                 <a:cs typeface="Be Vietnam Pro" pitchFamily="34" charset="-120"/>
               </a:rPr>
-              <a:t>Mở</a:t>
+              <a:t>Quan</a:t>
+            </a:r>
+            <a:r>
+              <a:rPr lang="en-US" sz="2250" b="1" dirty="0" spc="1" kern="0">
+                <a:solidFill>
+                  <a:srgbClr val="FFB454"/>
+                </a:solidFill>
+                <a:latin typeface="Be Vietnam Pro" pitchFamily="34" charset="0"/>
+                <a:ea typeface="Be Vietnam Pro" pitchFamily="34" charset="-122"/>
+                <a:cs typeface="Be Vietnam Pro" pitchFamily="34" charset="-120"/>
+              </a:rPr>
+              <a:t> hệ</a:t>
+            </a:r>
+            <a:r>
+              <a:rPr lang="en-US" sz="2250" b="1" dirty="0" spc="-7" kern="0">
+                <a:solidFill>
+                  <a:srgbClr val="FFB454"/>
+                </a:solidFill>
+                <a:latin typeface="Be Vietnam Pro" pitchFamily="34" charset="0"/>
+                <a:ea typeface="Be Vietnam Pro" pitchFamily="34" charset="-122"/>
+                <a:cs typeface="Be Vietnam Pro" pitchFamily="34" charset="-120"/>
+              </a:rPr>
+              <a:t> với</a:t>
+            </a:r>
+            <a:r>
+              <a:rPr lang="en-US" sz="2250" b="1" dirty="0" spc="-3" kern="0">
+                <a:solidFill>
+                  <a:srgbClr val="FFB454"/>
+                </a:solidFill>
+                <a:latin typeface="Be Vietnam Pro" pitchFamily="34" charset="0"/>
+                <a:ea typeface="Be Vietnam Pro" pitchFamily="34" charset="-122"/>
+                <a:cs typeface="Be Vietnam Pro" pitchFamily="34" charset="-120"/>
+              </a:rPr>
+              <a:t> tổ</a:t>
+            </a:r>
+            <a:r>
+              <a:rPr lang="en-US" sz="2250" b="1" dirty="0" spc="13" kern="0">
+                <a:solidFill>
+                  <a:srgbClr val="FFB454"/>
+                </a:solidFill>
+                <a:latin typeface="Be Vietnam Pro" pitchFamily="34" charset="0"/>
+                <a:ea typeface="Be Vietnam Pro" pitchFamily="34" charset="-122"/>
+                <a:cs typeface="Be Vietnam Pro" pitchFamily="34" charset="-120"/>
+              </a:rPr>
+              <a:t> chức</a:t>
             </a:r>
             <a:r>
               <a:rPr lang="en-US" sz="2250" b="1" dirty="0" spc="0" kern="0">
@@ -6408,7 +6683,51 @@
                 <a:ea typeface="Be Vietnam Pro" pitchFamily="34" charset="-122"/>
                 <a:cs typeface="Be Vietnam Pro" pitchFamily="34" charset="-120"/>
               </a:rPr>
-              <a:t> tài</a:t>
+              <a:t> nhận</a:t>
+            </a:r>
+            <a:r>
+              <a:rPr lang="en-US" sz="2250" b="1" dirty="0" spc="-2" kern="0">
+                <a:solidFill>
+                  <a:srgbClr val="FFB454"/>
+                </a:solidFill>
+                <a:latin typeface="Be Vietnam Pro" pitchFamily="34" charset="0"/>
+                <a:ea typeface="Be Vietnam Pro" pitchFamily="34" charset="-122"/>
+                <a:cs typeface="Be Vietnam Pro" pitchFamily="34" charset="-120"/>
+              </a:rPr>
+              <a:t> tiền</a:t>
+            </a:r>
+            <a:r>
+              <a:rPr lang="en-US" sz="2250" b="1" dirty="0" spc="44" kern="0">
+                <a:solidFill>
+                  <a:srgbClr val="FFB454"/>
+                </a:solidFill>
+                <a:latin typeface="Be Vietnam Pro" pitchFamily="34" charset="0"/>
+                <a:ea typeface="Be Vietnam Pro" pitchFamily="34" charset="-122"/>
+                <a:cs typeface="Be Vietnam Pro" pitchFamily="34" charset="-120"/>
+              </a:rPr>
+              <a:t> gửi</a:t>
+            </a:r>
+            <a:r>
+              <a:rPr lang="en-US" sz="2250" b="1" dirty="0" spc="2" kern="0">
+                <a:solidFill>
+                  <a:srgbClr val="FFB454"/>
+                </a:solidFill>
+                <a:latin typeface="Be Vietnam Pro" pitchFamily="34" charset="0"/>
+                <a:ea typeface="Be Vietnam Pro" pitchFamily="34" charset="-122"/>
+                <a:cs typeface="Be Vietnam Pro" pitchFamily="34" charset="-120"/>
+              </a:rPr>
+              <a:t> đủ</a:t>
+            </a:r>
+            <a:r>
+              <a:rPr lang="en-US" sz="2250" b="1" dirty="0" spc="15" kern="0">
+                <a:solidFill>
+                  <a:srgbClr val="FFB454"/>
+                </a:solidFill>
+                <a:latin typeface="Be Vietnam Pro" pitchFamily="34" charset="0"/>
+                <a:ea typeface="Be Vietnam Pro" pitchFamily="34" charset="-122"/>
+                <a:cs typeface="Be Vietnam Pro" pitchFamily="34" charset="-120"/>
+              </a:rPr>
+              <a:t> điều</a:t>
             </a:r>
             <a:r>
               <a:rPr lang="en-US" sz="2250" b="1" dirty="0" spc="-1" kern="0">
@@ -6419,10 +6738,10 @@
                 <a:ea typeface="Be Vietnam Pro" pitchFamily="34" charset="-122"/>
                 <a:cs typeface="Be Vietnam Pro" pitchFamily="34" charset="-120"/>
               </a:rPr>
-              <a:t> khoản</a:t>
-            </a:r>
-            <a:r>
-              <a:rPr lang="en-US" sz="2250" b="1" dirty="0" spc="6" kern="0">
+              <a:t> kiện:</a:t>
+            </a:r>
+            <a:r>
+              <a:rPr lang="en-US" sz="2250" b="1" dirty="0" spc="2" kern="0">
                 <a:solidFill>
                   <a:srgbClr val="FFB454"/>
                 </a:solidFill>
@@ -6430,51 +6749,7 @@
                 <a:ea typeface="Be Vietnam Pro" pitchFamily="34" charset="-122"/>
                 <a:cs typeface="Be Vietnam Pro" pitchFamily="34" charset="-120"/>
               </a:rPr>
-              <a:t> ở</a:t>
-            </a:r>
-            <a:r>
-              <a:rPr lang="en-US" sz="2250" b="1" dirty="0" spc="-6" kern="0">
-                <a:solidFill>
-                  <a:srgbClr val="FFB454"/>
-                </a:solidFill>
-                <a:latin typeface="Be Vietnam Pro" pitchFamily="34" charset="0"/>
-                <a:ea typeface="Be Vietnam Pro" pitchFamily="34" charset="-122"/>
-                <a:cs typeface="Be Vietnam Pro" pitchFamily="34" charset="-120"/>
-              </a:rPr>
-              <a:t> một ngân</a:t>
-            </a:r>
-            <a:r>
-              <a:rPr lang="en-US" sz="2250" b="1" dirty="0" spc="-3" kern="0">
-                <a:solidFill>
-                  <a:srgbClr val="FFB454"/>
-                </a:solidFill>
-                <a:latin typeface="Be Vietnam Pro" pitchFamily="34" charset="0"/>
-                <a:ea typeface="Be Vietnam Pro" pitchFamily="34" charset="-122"/>
-                <a:cs typeface="Be Vietnam Pro" pitchFamily="34" charset="-120"/>
-              </a:rPr>
-              <a:t> hàng</a:t>
-            </a:r>
-            <a:r>
-              <a:rPr lang="en-US" sz="2250" b="1" dirty="0" spc="5" kern="0">
-                <a:solidFill>
-                  <a:srgbClr val="FFB454"/>
-                </a:solidFill>
-                <a:latin typeface="Be Vietnam Pro" pitchFamily="34" charset="0"/>
-                <a:ea typeface="Be Vietnam Pro" pitchFamily="34" charset="-122"/>
-                <a:cs typeface="Be Vietnam Pro" pitchFamily="34" charset="-120"/>
-              </a:rPr>
-              <a:t> thương</a:t>
-            </a:r>
-            <a:r>
-              <a:rPr lang="en-US" sz="2250" b="1" dirty="0" spc="2" kern="0">
-                <a:solidFill>
-                  <a:srgbClr val="FFB454"/>
-                </a:solidFill>
-                <a:latin typeface="Be Vietnam Pro" pitchFamily="34" charset="0"/>
-                <a:ea typeface="Be Vietnam Pro" pitchFamily="34" charset="-122"/>
-                <a:cs typeface="Be Vietnam Pro" pitchFamily="34" charset="-120"/>
-              </a:rPr>
-              <a:t> mại: ODFI</a:t>
+              <a:t> ODFI</a:t>
             </a:r>
             <a:endParaRPr lang="en-US" sz="2250" dirty="0"/>
           </a:p>
@@ -6525,7 +6800,7 @@
               <a:t>Chỉ</a:t>
             </a:r>
             <a:r>
-              <a:rPr lang="en-US" sz="2250" b="1" dirty="0" spc="-6" kern="0">
+              <a:rPr lang="en-US" sz="2250" b="1" dirty="0" spc="-3" kern="0">
                 <a:solidFill>
                   <a:srgbClr val="3DD6A0"/>
                 </a:solidFill>
@@ -6533,10 +6808,10 @@
                 <a:ea typeface="Be Vietnam Pro" pitchFamily="34" charset="-122"/>
                 <a:cs typeface="Be Vietnam Pro" pitchFamily="34" charset="-120"/>
               </a:rPr>
-              <a:t> ngân</a:t>
-            </a:r>
-            <a:r>
-              <a:rPr lang="en-US" sz="2250" b="1" dirty="0" spc="-3" kern="0">
+              <a:t> tổ</a:t>
+            </a:r>
+            <a:r>
+              <a:rPr lang="en-US" sz="2250" b="1" dirty="0" spc="13" kern="0">
                 <a:solidFill>
                   <a:srgbClr val="3DD6A0"/>
                 </a:solidFill>
@@ -6544,7 +6819,29 @@
                 <a:ea typeface="Be Vietnam Pro" pitchFamily="34" charset="-122"/>
                 <a:cs typeface="Be Vietnam Pro" pitchFamily="34" charset="-120"/>
               </a:rPr>
-              <a:t> hàng</a:t>
+              <a:t> chức</a:t>
+            </a:r>
+            <a:r>
+              <a:rPr lang="en-US" sz="2250" b="1" dirty="0" spc="0" kern="0">
+                <a:solidFill>
+                  <a:srgbClr val="3DD6A0"/>
+                </a:solidFill>
+                <a:latin typeface="Be Vietnam Pro" pitchFamily="34" charset="0"/>
+                <a:ea typeface="Be Vietnam Pro" pitchFamily="34" charset="-122"/>
+                <a:cs typeface="Be Vietnam Pro" pitchFamily="34" charset="-120"/>
+              </a:rPr>
+              <a:t> như</a:t>
+            </a:r>
+            <a:r>
+              <a:rPr lang="en-US" sz="2250" b="1" dirty="0" spc="-18" kern="0">
+                <a:solidFill>
+                  <a:srgbClr val="3DD6A0"/>
+                </a:solidFill>
+                <a:latin typeface="Be Vietnam Pro" pitchFamily="34" charset="0"/>
+                <a:ea typeface="Be Vietnam Pro" pitchFamily="34" charset="-122"/>
+                <a:cs typeface="Be Vietnam Pro" pitchFamily="34" charset="-120"/>
+              </a:rPr>
+              <a:t> vậy</a:t>
             </a:r>
             <a:r>
               <a:rPr lang="en-US" sz="2250" b="1" dirty="0" spc="6" kern="0">
@@ -6558,7 +6855,7 @@
               <a:t> mới</a:t>
             </a:r>
             <a:r>
-              <a:rPr lang="en-US" sz="2250" b="1" dirty="0" spc="12" kern="0">
+              <a:rPr lang="en-US" sz="2250" b="1" dirty="0" spc="14" kern="0">
                 <a:solidFill>
                   <a:srgbClr val="3DD6A0"/>
                 </a:solidFill>
@@ -6566,10 +6863,10 @@
                 <a:ea typeface="Be Vietnam Pro" pitchFamily="34" charset="-122"/>
                 <a:cs typeface="Be Vietnam Pro" pitchFamily="34" charset="-120"/>
               </a:rPr>
-              <a:t> được</a:t>
-            </a:r>
-            <a:r>
-              <a:rPr lang="en-US" sz="2250" b="1" dirty="0" spc="4" kern="0">
+              <a:t> đưa</a:t>
+            </a:r>
+            <a:r>
+              <a:rPr lang="en-US" sz="2250" b="1" dirty="0" spc="-4" kern="0">
                 <a:solidFill>
                   <a:srgbClr val="3DD6A0"/>
                 </a:solidFill>
@@ -6577,10 +6874,10 @@
                 <a:ea typeface="Be Vietnam Pro" pitchFamily="34" charset="-122"/>
                 <a:cs typeface="Be Vietnam Pro" pitchFamily="34" charset="-120"/>
               </a:rPr>
-              <a:t> khởi</a:t>
-            </a:r>
-            <a:r>
-              <a:rPr lang="en-US" sz="2250" b="1" dirty="0" spc="2" kern="0">
+              <a:t> lệnh</a:t>
+            </a:r>
+            <a:r>
+              <a:rPr lang="en-US" sz="2250" b="1" dirty="0" spc="-8" kern="0">
                 <a:solidFill>
                   <a:srgbClr val="3DD6A0"/>
                 </a:solidFill>
@@ -6588,7 +6885,7 @@
                 <a:ea typeface="Be Vietnam Pro" pitchFamily="34" charset="-122"/>
                 <a:cs typeface="Be Vietnam Pro" pitchFamily="34" charset="-120"/>
               </a:rPr>
-              <a:t> tạo</a:t>
+              <a:t> vào</a:t>
             </a:r>
             <a:r>
               <a:rPr lang="en-US" sz="2250" b="1" dirty="0" spc="-16" kern="0">
@@ -6600,28 +6897,6 @@
                 <a:cs typeface="Be Vietnam Pro" pitchFamily="34" charset="-120"/>
               </a:rPr>
               <a:t> ACH</a:t>
-            </a:r>
-            <a:r>
-              <a:rPr lang="en-US" sz="2250" b="1" dirty="0" spc="12" kern="0">
-                <a:solidFill>
-                  <a:srgbClr val="3DD6A0"/>
-                </a:solidFill>
-                <a:latin typeface="Be Vietnam Pro" pitchFamily="34" charset="0"/>
-                <a:ea typeface="Be Vietnam Pro" pitchFamily="34" charset="-122"/>
-                <a:cs typeface="Be Vietnam Pro" pitchFamily="34" charset="-120"/>
-              </a:rPr>
-              <a:t> trực</a:t>
-            </a:r>
-            <a:r>
-              <a:rPr lang="en-US" sz="2250" b="1" dirty="0" spc="0" kern="0">
-                <a:solidFill>
-                  <a:srgbClr val="3DD6A0"/>
-                </a:solidFill>
-                <a:latin typeface="Be Vietnam Pro" pitchFamily="34" charset="0"/>
-                <a:ea typeface="Be Vietnam Pro" pitchFamily="34" charset="-122"/>
-                <a:cs typeface="Be Vietnam Pro" pitchFamily="34" charset="-120"/>
-              </a:rPr>
-              <a:t> tiếp</a:t>
             </a:r>
             <a:endParaRPr lang="en-US" sz="2250" dirty="0"/>
           </a:p>
@@ -7319,7 +7594,7 @@
               <a:t> trước</a:t>
             </a:r>
             <a:r>
-              <a:rPr lang="en-US" sz="6900" dirty="0" spc="0" kern="0">
+              <a:rPr lang="en-US" sz="6900" dirty="0" spc="1" kern="0">
                 <a:solidFill>
                   <a:srgbClr val="14161C"/>
                 </a:solidFill>
@@ -7327,10 +7602,10 @@
                 <a:ea typeface="Bricolage Grotesque ExtraBold" pitchFamily="34" charset="-122"/>
                 <a:cs typeface="Bricolage Grotesque ExtraBold" pitchFamily="34" charset="-120"/>
               </a:rPr>
-              <a:t> 19</a:t>
-            </a:r>
-            <a:r>
-              <a:rPr lang="en-US" sz="6900" dirty="0" spc="1" kern="0">
+              <a:t> giờ</a:t>
+            </a:r>
+            <a:r>
+              <a:rPr lang="en-US" sz="6900" dirty="0" spc="-9" kern="0">
                 <a:solidFill>
                   <a:srgbClr val="14161C"/>
                 </a:solidFill>
@@ -7338,7 +7613,7 @@
                 <a:ea typeface="Bricolage Grotesque ExtraBold" pitchFamily="34" charset="-122"/>
                 <a:cs typeface="Bricolage Grotesque ExtraBold" pitchFamily="34" charset="-120"/>
               </a:rPr>
-              <a:t> giờ</a:t>
+              <a:t> chốt</a:t>
             </a:r>
             <a:endParaRPr lang="en-US" sz="6900" dirty="0"/>
           </a:p>
@@ -8075,21 +8350,65 @@
                 <a:ea typeface="Be Vietnam Pro" pitchFamily="34" charset="-122"/>
                 <a:cs typeface="Be Vietnam Pro" pitchFamily="34" charset="-120"/>
               </a:rPr>
+              <a:t> ODFI</a:t>
+            </a:r>
+            <a:r>
+              <a:rPr lang="en-US" sz="2100" b="1" dirty="0" spc="-2" kern="0">
+                <a:solidFill>
+                  <a:srgbClr val="F3EEE3"/>
+                </a:solidFill>
+                <a:latin typeface="Be Vietnam Pro" pitchFamily="34" charset="0"/>
+                <a:ea typeface="Be Vietnam Pro" pitchFamily="34" charset="-122"/>
+                <a:cs typeface="Be Vietnam Pro" pitchFamily="34" charset="-120"/>
+              </a:rPr>
+              <a:t> đặt</a:t>
+            </a:r>
+            <a:r>
+              <a:rPr lang="en-US" sz="2100" b="1" dirty="0" spc="0" kern="0">
+                <a:solidFill>
+                  <a:srgbClr val="F3EEE3"/>
+                </a:solidFill>
+                <a:latin typeface="Be Vietnam Pro" pitchFamily="34" charset="0"/>
+                <a:ea typeface="Be Vietnam Pro" pitchFamily="34" charset="-122"/>
+                <a:cs typeface="Be Vietnam Pro" pitchFamily="34" charset="-120"/>
+              </a:rPr>
               <a:t> hạn</a:t>
             </a:r>
             <a:r>
-              <a:rPr lang="en-US" sz="2100" b="1" dirty="0" spc="-10" kern="0">
-                <a:solidFill>
-                  <a:srgbClr val="F3EEE3"/>
-                </a:solidFill>
-                <a:latin typeface="Be Vietnam Pro" pitchFamily="34" charset="0"/>
-                <a:ea typeface="Be Vietnam Pro" pitchFamily="34" charset="-122"/>
-                <a:cs typeface="Be Vietnam Pro" pitchFamily="34" charset="-120"/>
-              </a:rPr>
-              <a:t> chốt</a:t>
-            </a:r>
-            <a:r>
-              <a:rPr lang="en-US" sz="2100" b="1" dirty="0" spc="-1" kern="0">
+              <a:rPr lang="en-US" sz="2100" b="1" dirty="0" spc="-8" kern="0">
+                <a:solidFill>
+                  <a:srgbClr val="F3EEE3"/>
+                </a:solidFill>
+                <a:latin typeface="Be Vietnam Pro" pitchFamily="34" charset="0"/>
+                <a:ea typeface="Be Vietnam Pro" pitchFamily="34" charset="-122"/>
+                <a:cs typeface="Be Vietnam Pro" pitchFamily="34" charset="-120"/>
+              </a:rPr>
+              <a:t> chốt,</a:t>
+            </a:r>
+            <a:r>
+              <a:rPr lang="en-US" sz="2100" b="1" dirty="0" spc="-4" kern="0">
+                <a:solidFill>
+                  <a:srgbClr val="F3EEE3"/>
+                </a:solidFill>
+                <a:latin typeface="Be Vietnam Pro" pitchFamily="34" charset="0"/>
+                <a:ea typeface="Be Vietnam Pro" pitchFamily="34" charset="-122"/>
+                <a:cs typeface="Be Vietnam Pro" pitchFamily="34" charset="-120"/>
+              </a:rPr>
+              <a:t> ví</a:t>
+            </a:r>
+            <a:r>
+              <a:rPr lang="en-US" sz="2100" b="1" dirty="0" spc="0" kern="0">
+                <a:solidFill>
+                  <a:srgbClr val="F3EEE3"/>
+                </a:solidFill>
+                <a:latin typeface="Be Vietnam Pro" pitchFamily="34" charset="0"/>
+                <a:ea typeface="Be Vietnam Pro" pitchFamily="34" charset="-122"/>
+                <a:cs typeface="Be Vietnam Pro" pitchFamily="34" charset="-120"/>
+              </a:rPr>
+              <a:t> dụ</a:t>
+            </a:r>
+            <a:r>
+              <a:rPr lang="en-US" sz="2100" b="1" dirty="0" spc="-2" kern="0">
                 <a:solidFill>
                   <a:srgbClr val="F3EEE3"/>
                 </a:solidFill>
@@ -10086,7 +10405,7 @@
               <a:buNone/>
             </a:pPr>
             <a:r>
-              <a:rPr lang="en-US" sz="4500" dirty="0" spc="2" kern="0">
+              <a:rPr lang="en-US" sz="4500" dirty="0" spc="-27" kern="0">
                 <a:solidFill>
                   <a:srgbClr val="F3EEE3"/>
                 </a:solidFill>
@@ -10094,7 +10413,7 @@
                 <a:ea typeface="Bricolage Grotesque ExtraBold" pitchFamily="34" charset="-122"/>
                 <a:cs typeface="Bricolage Grotesque ExtraBold" pitchFamily="34" charset="-120"/>
               </a:rPr>
-              <a:t>6</a:t>
+              <a:t>Trong</a:t>
             </a:r>
             <a:r>
               <a:rPr lang="en-US" sz="4500" dirty="0" spc="0" kern="0">
@@ -10105,10 +10424,10 @@
                 <a:ea typeface="Bricolage Grotesque ExtraBold" pitchFamily="34" charset="-122"/>
                 <a:cs typeface="Bricolage Grotesque ExtraBold" pitchFamily="34" charset="-120"/>
               </a:rPr>
-              <a:t> giờ</a:t>
-            </a:r>
-            <a:r>
-              <a:rPr lang="en-US" sz="4500" dirty="0" spc="4" kern="0">
+              <a:t> ví</a:t>
+            </a:r>
+            <a:r>
+              <a:rPr lang="en-US" sz="4500" dirty="0" spc="-1" kern="0">
                 <a:solidFill>
                   <a:srgbClr val="F3EEE3"/>
                 </a:solidFill>
@@ -10116,10 +10435,10 @@
                 <a:ea typeface="Bricolage Grotesque ExtraBold" pitchFamily="34" charset="-122"/>
                 <a:cs typeface="Bricolage Grotesque ExtraBold" pitchFamily="34" charset="-120"/>
               </a:rPr>
-              <a:t> sáng:</a:t>
-            </a:r>
-            <a:r>
-              <a:rPr lang="en-US" sz="4500" dirty="0" spc="0" kern="0">
+              <a:t> dụ,</a:t>
+            </a:r>
+            <a:r>
+              <a:rPr lang="en-US" sz="4500" dirty="0" spc="1" kern="0">
                 <a:solidFill>
                   <a:srgbClr val="F3EEE3"/>
                 </a:solidFill>
@@ -10127,10 +10446,10 @@
                 <a:ea typeface="Bricolage Grotesque ExtraBold" pitchFamily="34" charset="-122"/>
                 <a:cs typeface="Bricolage Grotesque ExtraBold" pitchFamily="34" charset="-120"/>
               </a:rPr>
-              <a:t> RDFI</a:t>
-            </a:r>
-            <a:r>
-              <a:rPr lang="en-US" sz="4500" dirty="0" spc="-2" kern="0">
+              <a:t> 6</a:t>
+            </a:r>
+            <a:r>
+              <a:rPr lang="en-US" sz="4500" dirty="0" spc="0" kern="0">
                 <a:solidFill>
                   <a:srgbClr val="F3EEE3"/>
                 </a:solidFill>
@@ -10138,10 +10457,10 @@
                 <a:ea typeface="Bricolage Grotesque ExtraBold" pitchFamily="34" charset="-122"/>
                 <a:cs typeface="Bricolage Grotesque ExtraBold" pitchFamily="34" charset="-120"/>
               </a:rPr>
-              <a:t> mở</a:t>
-            </a:r>
-            <a:r>
-              <a:rPr lang="en-US" sz="4500" dirty="0" spc="-35" kern="0">
+              <a:t> giờ</a:t>
+            </a:r>
+            <a:r>
+              <a:rPr lang="en-US" sz="4500" dirty="0" spc="4" kern="0">
                 <a:solidFill>
                   <a:srgbClr val="F3EEE3"/>
                 </a:solidFill>
@@ -10149,10 +10468,10 @@
                 <a:ea typeface="Bricolage Grotesque ExtraBold" pitchFamily="34" charset="-122"/>
                 <a:cs typeface="Bricolage Grotesque ExtraBold" pitchFamily="34" charset="-120"/>
               </a:rPr>
-              <a:t> cửa</a:t>
-            </a:r>
-            <a:r>
-              <a:rPr lang="en-US" sz="4500" dirty="0" spc="-47" kern="0">
+              <a:t> sáng:</a:t>
+            </a:r>
+            <a:r>
+              <a:rPr lang="en-US" sz="4500" dirty="0" spc="0" kern="0">
                 <a:solidFill>
                   <a:srgbClr val="F3EEE3"/>
                 </a:solidFill>
@@ -10160,10 +10479,10 @@
                 <a:ea typeface="Bricolage Grotesque ExtraBold" pitchFamily="34" charset="-122"/>
                 <a:cs typeface="Bricolage Grotesque ExtraBold" pitchFamily="34" charset="-120"/>
               </a:rPr>
-              <a:t> và</a:t>
-            </a:r>
-            <a:r>
-              <a:rPr lang="en-US" sz="4500" dirty="0" spc="1" kern="0">
+              <a:t> RDFI</a:t>
+            </a:r>
+            <a:r>
+              <a:rPr lang="en-US" sz="4500" dirty="0" spc="-1" kern="0">
                 <a:solidFill>
                   <a:srgbClr val="F3EEE3"/>
                 </a:solidFill>
@@ -10171,10 +10490,43 @@
                 <a:ea typeface="Bricolage Grotesque ExtraBold" pitchFamily="34" charset="-122"/>
                 <a:cs typeface="Bricolage Grotesque ExtraBold" pitchFamily="34" charset="-120"/>
               </a:rPr>
+              <a:t> mở</a:t>
+            </a:r>
+            <a:r>
+              <a:rPr lang="en-US" sz="4500" dirty="0" spc="-36" kern="0">
+                <a:solidFill>
+                  <a:srgbClr val="F3EEE3"/>
+                </a:solidFill>
+                <a:latin typeface="Bricolage Grotesque ExtraBold" pitchFamily="34" charset="0"/>
+                <a:ea typeface="Bricolage Grotesque ExtraBold" pitchFamily="34" charset="-122"/>
+                <a:cs typeface="Bricolage Grotesque ExtraBold" pitchFamily="34" charset="-120"/>
+              </a:rPr>
+              <a:t> cửa</a:t>
+            </a:r>
+            <a:r>
+              <a:rPr lang="en-US" sz="4500" dirty="0" spc="-46" kern="0">
+                <a:solidFill>
+                  <a:srgbClr val="F3EEE3"/>
+                </a:solidFill>
+                <a:latin typeface="Bricolage Grotesque ExtraBold" pitchFamily="34" charset="0"/>
+                <a:ea typeface="Bricolage Grotesque ExtraBold" pitchFamily="34" charset="-122"/>
+                <a:cs typeface="Bricolage Grotesque ExtraBold" pitchFamily="34" charset="-120"/>
+              </a:rPr>
+              <a:t> và</a:t>
+            </a:r>
+            <a:r>
+              <a:rPr lang="en-US" sz="4500" dirty="0" spc="0" kern="0">
+                <a:solidFill>
+                  <a:srgbClr val="F3EEE3"/>
+                </a:solidFill>
+                <a:latin typeface="Bricolage Grotesque ExtraBold" pitchFamily="34" charset="0"/>
+                <a:ea typeface="Bricolage Grotesque ExtraBold" pitchFamily="34" charset="-122"/>
+                <a:cs typeface="Bricolage Grotesque ExtraBold" pitchFamily="34" charset="-120"/>
+              </a:rPr>
               <a:t> cộng</a:t>
             </a:r>
             <a:r>
-              <a:rPr lang="en-US" sz="4500" dirty="0" spc="0" kern="0">
+              <a:rPr lang="en-US" sz="4500" dirty="0" spc="1" kern="0">
                 <a:solidFill>
                   <a:srgbClr val="F3EEE3"/>
                 </a:solidFill>
@@ -10268,7 +10620,7 @@
               <a:buNone/>
             </a:pPr>
             <a:r>
-              <a:rPr lang="en-US" sz="2250" dirty="0" spc="-32" kern="0">
+              <a:rPr lang="en-US" sz="2250" dirty="0" spc="-22" kern="0">
                 <a:solidFill>
                   <a:srgbClr val="14161C"/>
                 </a:solidFill>
@@ -10276,7 +10628,18 @@
                 <a:ea typeface="Be Vietnam Pro" pitchFamily="34" charset="-122"/>
                 <a:cs typeface="Be Vietnam Pro" pitchFamily="34" charset="-120"/>
               </a:rPr>
-              <a:t>ACH</a:t>
+              <a:t>Lệnh</a:t>
+            </a:r>
+            <a:r>
+              <a:rPr lang="en-US" sz="2250" dirty="0" spc="5" kern="0">
+                <a:solidFill>
+                  <a:srgbClr val="14161C"/>
+                </a:solidFill>
+                <a:latin typeface="Be Vietnam Pro" pitchFamily="34" charset="0"/>
+                <a:ea typeface="Be Vietnam Pro" pitchFamily="34" charset="-122"/>
+                <a:cs typeface="Be Vietnam Pro" pitchFamily="34" charset="-120"/>
+              </a:rPr>
+              <a:t> thường</a:t>
             </a:r>
             <a:r>
               <a:rPr lang="en-US" sz="2250" dirty="0" spc="-16" kern="0">
@@ -10301,7 +10664,7 @@
               <a:t> toán</a:t>
             </a:r>
             <a:r>
-              <a:rPr lang="en-US" sz="2250" dirty="0" spc="-14" kern="0">
+              <a:rPr lang="en-US" sz="2250" dirty="0" spc="-17" kern="0">
                 <a:solidFill>
                   <a:srgbClr val="14161C"/>
                 </a:solidFill>
@@ -10309,10 +10672,10 @@
                 <a:ea typeface="Be Vietnam Pro" pitchFamily="34" charset="-122"/>
                 <a:cs typeface="Be Vietnam Pro" pitchFamily="34" charset="-120"/>
               </a:rPr>
-              <a:t> vào</a:t>
-            </a:r>
-            <a:r>
-              <a:rPr lang="en-US" sz="2250" dirty="0" spc="-17" kern="0">
+              <a:t> ngày</a:t>
+            </a:r>
+            <a:r>
+              <a:rPr lang="en-US" sz="2250" dirty="0" spc="-1" kern="0">
                 <a:solidFill>
                   <a:srgbClr val="14161C"/>
                 </a:solidFill>
@@ -10320,9 +10683,152 @@
                 <a:ea typeface="Be Vietnam Pro" pitchFamily="34" charset="-122"/>
                 <a:cs typeface="Be Vietnam Pro" pitchFamily="34" charset="-120"/>
               </a:rPr>
+              <a:t> làm</a:t>
+            </a:r>
+            <a:r>
+              <a:rPr lang="en-US" sz="2250" dirty="0" spc="-3" kern="0">
+                <a:solidFill>
+                  <a:srgbClr val="14161C"/>
+                </a:solidFill>
+                <a:latin typeface="Be Vietnam Pro" pitchFamily="34" charset="0"/>
+                <a:ea typeface="Be Vietnam Pro" pitchFamily="34" charset="-122"/>
+                <a:cs typeface="Be Vietnam Pro" pitchFamily="34" charset="-120"/>
+              </a:rPr>
+              <a:t> việc</a:t>
+            </a:r>
+            <a:r>
+              <a:rPr lang="en-US" sz="2250" dirty="0" spc="-35" kern="0">
+                <a:solidFill>
+                  <a:srgbClr val="14161C"/>
+                </a:solidFill>
+                <a:latin typeface="Be Vietnam Pro" pitchFamily="34" charset="0"/>
+                <a:ea typeface="Be Vietnam Pro" pitchFamily="34" charset="-122"/>
+                <a:cs typeface="Be Vietnam Pro" pitchFamily="34" charset="-120"/>
+              </a:rPr>
+              <a:t> kế</a:t>
+            </a:r>
+            <a:r>
+              <a:rPr lang="en-US" sz="2250" dirty="0" spc="0" kern="0">
+                <a:solidFill>
+                  <a:srgbClr val="14161C"/>
+                </a:solidFill>
+                <a:latin typeface="Be Vietnam Pro" pitchFamily="34" charset="0"/>
+                <a:ea typeface="Be Vietnam Pro" pitchFamily="34" charset="-122"/>
+                <a:cs typeface="Be Vietnam Pro" pitchFamily="34" charset="-120"/>
+              </a:rPr>
+              <a:t> tiếp</a:t>
+            </a:r>
+            <a:r>
+              <a:rPr lang="en-US" sz="2250" dirty="0" spc="-3" kern="0">
+                <a:solidFill>
+                  <a:srgbClr val="14161C"/>
+                </a:solidFill>
+                <a:latin typeface="Be Vietnam Pro" pitchFamily="34" charset="0"/>
+                <a:ea typeface="Be Vietnam Pro" pitchFamily="34" charset="-122"/>
+                <a:cs typeface="Be Vietnam Pro" pitchFamily="34" charset="-120"/>
+              </a:rPr>
+              <a:t> hoặc</a:t>
+            </a:r>
+            <a:r>
+              <a:rPr lang="en-US" sz="2250" dirty="0" spc="-16" kern="0">
+                <a:solidFill>
+                  <a:srgbClr val="14161C"/>
+                </a:solidFill>
+                <a:latin typeface="Be Vietnam Pro" pitchFamily="34" charset="0"/>
+                <a:ea typeface="Be Vietnam Pro" pitchFamily="34" charset="-122"/>
+                <a:cs typeface="Be Vietnam Pro" pitchFamily="34" charset="-120"/>
+              </a:rPr>
               <a:t> ngày</a:t>
             </a:r>
             <a:r>
+              <a:rPr lang="en-US" sz="2250" dirty="0" spc="-2" kern="0">
+                <a:solidFill>
+                  <a:srgbClr val="14161C"/>
+                </a:solidFill>
+                <a:latin typeface="Be Vietnam Pro" pitchFamily="34" charset="0"/>
+                <a:ea typeface="Be Vietnam Pro" pitchFamily="34" charset="-122"/>
+                <a:cs typeface="Be Vietnam Pro" pitchFamily="34" charset="-120"/>
+              </a:rPr>
+              <a:t> hiệu</a:t>
+            </a:r>
+            <a:r>
+              <a:rPr lang="en-US" sz="2250" dirty="0" spc="8" kern="0">
+                <a:solidFill>
+                  <a:srgbClr val="14161C"/>
+                </a:solidFill>
+                <a:latin typeface="Be Vietnam Pro" pitchFamily="34" charset="0"/>
+                <a:ea typeface="Be Vietnam Pro" pitchFamily="34" charset="-122"/>
+                <a:cs typeface="Be Vietnam Pro" pitchFamily="34" charset="-120"/>
+              </a:rPr>
+              <a:t> lực;</a:t>
+            </a:r>
+            <a:r>
+              <a:rPr lang="en-US" sz="2250" dirty="0" spc="1" kern="0">
+                <a:solidFill>
+                  <a:srgbClr val="14161C"/>
+                </a:solidFill>
+                <a:latin typeface="Be Vietnam Pro" pitchFamily="34" charset="0"/>
+                <a:ea typeface="Be Vietnam Pro" pitchFamily="34" charset="-122"/>
+                <a:cs typeface="Be Vietnam Pro" pitchFamily="34" charset="-120"/>
+              </a:rPr>
+              <a:t> giờ</a:t>
+            </a:r>
+            <a:r>
+              <a:rPr lang="en-US" sz="2250" dirty="0" spc="-2" kern="0">
+                <a:solidFill>
+                  <a:srgbClr val="14161C"/>
+                </a:solidFill>
+                <a:latin typeface="Be Vietnam Pro" pitchFamily="34" charset="0"/>
+                <a:ea typeface="Be Vietnam Pro" pitchFamily="34" charset="-122"/>
+                <a:cs typeface="Be Vietnam Pro" pitchFamily="34" charset="-120"/>
+              </a:rPr>
+              <a:t> chốt</a:t>
+            </a:r>
+            <a:r>
+              <a:rPr lang="en-US" sz="2250" dirty="0" spc="1" kern="0">
+                <a:solidFill>
+                  <a:srgbClr val="14161C"/>
+                </a:solidFill>
+                <a:latin typeface="Be Vietnam Pro" pitchFamily="34" charset="0"/>
+                <a:ea typeface="Be Vietnam Pro" pitchFamily="34" charset="-122"/>
+                <a:cs typeface="Be Vietnam Pro" pitchFamily="34" charset="-120"/>
+              </a:rPr>
+              <a:t> do</a:t>
+            </a:r>
+            <a:r>
+              <a:rPr lang="en-US" sz="2250" dirty="0" spc="-9" kern="0">
+                <a:solidFill>
+                  <a:srgbClr val="14161C"/>
+                </a:solidFill>
+                <a:latin typeface="Be Vietnam Pro" pitchFamily="34" charset="0"/>
+                <a:ea typeface="Be Vietnam Pro" pitchFamily="34" charset="-122"/>
+                <a:cs typeface="Be Vietnam Pro" pitchFamily="34" charset="-120"/>
+              </a:rPr>
+              <a:t> ngân</a:t>
+            </a:r>
+            <a:r>
+              <a:rPr lang="en-US" sz="2250" dirty="0" spc="-1" kern="0">
+                <a:solidFill>
+                  <a:srgbClr val="14161C"/>
+                </a:solidFill>
+                <a:latin typeface="Be Vietnam Pro" pitchFamily="34" charset="0"/>
+                <a:ea typeface="Be Vietnam Pro" pitchFamily="34" charset="-122"/>
+                <a:cs typeface="Be Vietnam Pro" pitchFamily="34" charset="-120"/>
+              </a:rPr>
+              <a:t> hàng</a:t>
+            </a:r>
+            <a:r>
+              <a:rPr lang="en-US" sz="2250" dirty="0" spc="-11" kern="0">
+                <a:solidFill>
+                  <a:srgbClr val="14161C"/>
+                </a:solidFill>
+                <a:latin typeface="Be Vietnam Pro" pitchFamily="34" charset="0"/>
+                <a:ea typeface="Be Vietnam Pro" pitchFamily="34" charset="-122"/>
+                <a:cs typeface="Be Vietnam Pro" pitchFamily="34" charset="-120"/>
+              </a:rPr>
+              <a:t> gốc</a:t>
+            </a:r>
+            <a:r>
               <a:rPr lang="en-US" sz="2250" dirty="0" spc="2" kern="0">
                 <a:solidFill>
                   <a:srgbClr val="14161C"/>
@@ -10331,18 +10837,7 @@
                 <a:ea typeface="Be Vietnam Pro" pitchFamily="34" charset="-122"/>
                 <a:cs typeface="Be Vietnam Pro" pitchFamily="34" charset="-120"/>
               </a:rPr>
-              <a:t> hôm</a:t>
-            </a:r>
-            <a:r>
-              <a:rPr lang="en-US" sz="2250" dirty="0" spc="-3" kern="0">
-                <a:solidFill>
-                  <a:srgbClr val="14161C"/>
-                </a:solidFill>
-                <a:latin typeface="Be Vietnam Pro" pitchFamily="34" charset="0"/>
-                <a:ea typeface="Be Vietnam Pro" pitchFamily="34" charset="-122"/>
-                <a:cs typeface="Be Vietnam Pro" pitchFamily="34" charset="-120"/>
-              </a:rPr>
-              <a:t> sau.</a:t>
+              <a:t> đặt.</a:t>
             </a:r>
             <a:endParaRPr lang="en-US" sz="2250" dirty="0"/>
           </a:p>
@@ -10373,7 +10868,7 @@
               <a:buNone/>
             </a:pPr>
             <a:r>
-              <a:rPr lang="en-US" sz="2250" dirty="0" spc="-110" kern="0">
+              <a:rPr lang="en-US" sz="2250" dirty="0" spc="-32" kern="0">
                 <a:solidFill>
                   <a:srgbClr val="6B6A66"/>
                 </a:solidFill>
@@ -10381,10 +10876,10 @@
                 <a:ea typeface="Be Vietnam Pro" pitchFamily="34" charset="-122"/>
                 <a:cs typeface="Be Vietnam Pro" pitchFamily="34" charset="-120"/>
               </a:rPr>
-              <a:t>Từ</a:t>
-            </a:r>
-            <a:r>
-              <a:rPr lang="en-US" sz="2250" dirty="0" spc="2" kern="0">
+              <a:t>ACH</a:t>
+            </a:r>
+            <a:r>
+              <a:rPr lang="en-US" sz="2250" dirty="0" spc="-16" kern="0">
                 <a:solidFill>
                   <a:srgbClr val="6B6A66"/>
                 </a:solidFill>
@@ -10392,10 +10887,10 @@
                 <a:ea typeface="Be Vietnam Pro" pitchFamily="34" charset="-122"/>
                 <a:cs typeface="Be Vietnam Pro" pitchFamily="34" charset="-120"/>
               </a:rPr>
-              <a:t> 2018</a:t>
-            </a:r>
-            <a:r>
-              <a:rPr lang="en-US" sz="2250" dirty="0" spc="4" kern="0">
+              <a:t> trong ngày</a:t>
+            </a:r>
+            <a:r>
+              <a:rPr lang="en-US" sz="2250" dirty="0" spc="3" kern="0">
                 <a:solidFill>
                   <a:srgbClr val="6B6A66"/>
                 </a:solidFill>
@@ -10403,10 +10898,65 @@
                 <a:ea typeface="Be Vietnam Pro" pitchFamily="34" charset="-122"/>
                 <a:cs typeface="Be Vietnam Pro" pitchFamily="34" charset="-120"/>
               </a:rPr>
+              <a:t> từ</a:t>
+            </a:r>
+            <a:r>
+              <a:rPr lang="en-US" sz="2250" dirty="0" spc="1" kern="0">
+                <a:solidFill>
+                  <a:srgbClr val="6B6A66"/>
+                </a:solidFill>
+                <a:latin typeface="Be Vietnam Pro" pitchFamily="34" charset="0"/>
+                <a:ea typeface="Be Vietnam Pro" pitchFamily="34" charset="-122"/>
+                <a:cs typeface="Be Vietnam Pro" pitchFamily="34" charset="-120"/>
+              </a:rPr>
+              <a:t> 2016;</a:t>
+            </a:r>
+            <a:r>
+              <a:rPr lang="en-US" sz="2250" dirty="0" spc="-8" kern="0">
+                <a:solidFill>
+                  <a:srgbClr val="6B6A66"/>
+                </a:solidFill>
+                <a:latin typeface="Be Vietnam Pro" pitchFamily="34" charset="0"/>
+                <a:ea typeface="Be Vietnam Pro" pitchFamily="34" charset="-122"/>
+                <a:cs typeface="Be Vietnam Pro" pitchFamily="34" charset="-120"/>
+              </a:rPr>
+              <a:t> nay</a:t>
+            </a:r>
+            <a:r>
+              <a:rPr lang="en-US" sz="2250" dirty="0" spc="0" kern="0">
+                <a:solidFill>
+                  <a:srgbClr val="6B6A66"/>
+                </a:solidFill>
+                <a:latin typeface="Be Vietnam Pro" pitchFamily="34" charset="0"/>
+                <a:ea typeface="Be Vietnam Pro" pitchFamily="34" charset="-122"/>
+                <a:cs typeface="Be Vietnam Pro" pitchFamily="34" charset="-120"/>
+              </a:rPr>
+              <a:t> mỗi</a:t>
+            </a:r>
+            <a:r>
+              <a:rPr lang="en-US" sz="2250" dirty="0" spc="-17" kern="0">
+                <a:solidFill>
+                  <a:srgbClr val="6B6A66"/>
+                </a:solidFill>
+                <a:latin typeface="Be Vietnam Pro" pitchFamily="34" charset="0"/>
+                <a:ea typeface="Be Vietnam Pro" pitchFamily="34" charset="-122"/>
+                <a:cs typeface="Be Vietnam Pro" pitchFamily="34" charset="-120"/>
+              </a:rPr>
+              <a:t> ngày</a:t>
+            </a:r>
+            <a:r>
+              <a:rPr lang="en-US" sz="2250" dirty="0" spc="5" kern="0">
+                <a:solidFill>
+                  <a:srgbClr val="6B6A66"/>
+                </a:solidFill>
+                <a:latin typeface="Be Vietnam Pro" pitchFamily="34" charset="0"/>
+                <a:ea typeface="Be Vietnam Pro" pitchFamily="34" charset="-122"/>
+                <a:cs typeface="Be Vietnam Pro" pitchFamily="34" charset="-120"/>
+              </a:rPr>
               <a:t> có</a:t>
             </a:r>
             <a:r>
-              <a:rPr lang="en-US" sz="2250" dirty="0" spc="0" kern="0">
+              <a:rPr lang="en-US" sz="2250" dirty="0" spc="-1" kern="0">
                 <a:solidFill>
                   <a:srgbClr val="6B6A66"/>
                 </a:solidFill>
@@ -10414,10 +10964,10 @@
                 <a:ea typeface="Be Vietnam Pro" pitchFamily="34" charset="-122"/>
                 <a:cs typeface="Be Vietnam Pro" pitchFamily="34" charset="-120"/>
               </a:rPr>
-              <a:t> thể</a:t>
-            </a:r>
-            <a:r>
-              <a:rPr lang="en-US" sz="2250" dirty="0" spc="3" kern="0">
+              <a:t> nhiều</a:t>
+            </a:r>
+            <a:r>
+              <a:rPr lang="en-US" sz="2250" dirty="0" spc="14" kern="0">
                 <a:solidFill>
                   <a:srgbClr val="6B6A66"/>
                 </a:solidFill>
@@ -10425,10 +10975,10 @@
                 <a:ea typeface="Be Vietnam Pro" pitchFamily="34" charset="-122"/>
                 <a:cs typeface="Be Vietnam Pro" pitchFamily="34" charset="-120"/>
               </a:rPr>
-              <a:t> chọn</a:t>
-            </a:r>
-            <a:r>
-              <a:rPr lang="en-US" sz="2250" dirty="0" spc="-23" kern="0">
+              <a:t> đợt</a:t>
+            </a:r>
+            <a:r>
+              <a:rPr lang="en-US" sz="2250" dirty="0" spc="-16" kern="0">
                 <a:solidFill>
                   <a:srgbClr val="6B6A66"/>
                 </a:solidFill>
@@ -10436,10 +10986,10 @@
                 <a:ea typeface="Be Vietnam Pro" pitchFamily="34" charset="-122"/>
                 <a:cs typeface="Be Vietnam Pro" pitchFamily="34" charset="-120"/>
               </a:rPr>
-              <a:t> ACH</a:t>
-            </a:r>
-            <a:r>
-              <a:rPr lang="en-US" sz="2250" dirty="0" spc="-16" kern="0">
+              <a:t> quyết</a:t>
+            </a:r>
+            <a:r>
+              <a:rPr lang="en-US" sz="2250" dirty="0" spc="-9" kern="0">
                 <a:solidFill>
                   <a:srgbClr val="6B6A66"/>
                 </a:solidFill>
@@ -10447,18 +10997,7 @@
                 <a:ea typeface="Be Vietnam Pro" pitchFamily="34" charset="-122"/>
                 <a:cs typeface="Be Vietnam Pro" pitchFamily="34" charset="-120"/>
               </a:rPr>
-              <a:t> trong</a:t>
-            </a:r>
-            <a:r>
-              <a:rPr lang="en-US" sz="2250" dirty="0" spc="-13" kern="0">
-                <a:solidFill>
-                  <a:srgbClr val="6B6A66"/>
-                </a:solidFill>
-                <a:latin typeface="Be Vietnam Pro" pitchFamily="34" charset="0"/>
-                <a:ea typeface="Be Vietnam Pro" pitchFamily="34" charset="-122"/>
-                <a:cs typeface="Be Vietnam Pro" pitchFamily="34" charset="-120"/>
-              </a:rPr>
-              <a:t> ngày.</a:t>
+              <a:t> toán.</a:t>
             </a:r>
             <a:endParaRPr lang="en-US" sz="2250" dirty="0"/>
           </a:p>
